--- a/courses/learn_placement/module03-03-spread-legalize-lite/slides.pptx
+++ b/courses/learn_placement/module03-03-spread-legalize-lite/slides.pptx
@@ -16,6 +16,9 @@
     <p:sldId id="264" r:id="rId16"/>
     <p:sldId id="265" r:id="rId17"/>
     <p:sldId id="266" r:id="rId18"/>
+    <p:sldId id="267" r:id="rId19"/>
+    <p:sldId id="268" r:id="rId20"/>
+    <p:sldId id="269" r:id="rId21"/>
   </p:sldIdLst>
   <p:sldSz cx="12191695" cy="6858000" type="screen4x3"/>
   <p:notesSz cx="6858000" cy="9144000"/>
@@ -582,7 +585,7 @@
           <a:lstStyle/>
           <a:p>
             <a:r>
-              <a:t>Common traps: celebrating HPWL while cells pile into one bin; ignoring fixed pads A and D; mixing bbox and clique models in one report; keeping only the final SA iterate instead of the best; and forgetting that timing weights change the objective, not just the label.</a:t>
+              <a:t>In the browser lab track, open the **spread-legalize-lite** lab from the tools shelf. Load the starter placement, run the algorithm once, and read HPWL—and density when the panel shows it. Work the challenges that lock the goldens, then come back to implement the same loop yourself.</a:t>
             </a:r>
           </a:p>
         </p:txBody>
@@ -652,6 +655,146 @@
           <a:lstStyle/>
           <a:p>
             <a:r>
+              <a:t>In the implement track, open this module's EXAMPLES.md Pseudocode section and the course common solvers. Parse `tiny_place.json`, run the algorithm with a deterministic seed, and print coordinates plus HPWL. Match the browser goldens before you claim the checklist.</a:t>
+            </a:r>
+          </a:p>
+        </p:txBody>
+      </p:sp>
+      <p:sp>
+        <p:nvSpPr>
+          <p:cNvPr id="4" name="Slide Number Placeholder 3"/>
+          <p:cNvSpPr>
+            <a:spLocks noGrp="1"/>
+          </p:cNvSpPr>
+          <p:nvPr>
+            <p:ph type="sldNum" idx="5" sz="quarter"/>
+          </p:nvPr>
+        </p:nvSpPr>
+        <p:spPr/>
+      </p:sp>
+    </p:spTree>
+  </p:cSld>
+  <p:clrMapOvr>
+    <a:masterClrMapping/>
+  </p:clrMapOvr>
+</p:notes>
+</file>
+
+<file path=ppt/notesSlides/notesSlide12.xml><?xml version="1.0" encoding="utf-8"?>
+<p:notes xmlns:a="http://schemas.openxmlformats.org/drawingml/2006/main" xmlns:p="http://schemas.openxmlformats.org/presentationml/2006/main" xmlns:r="http://schemas.openxmlformats.org/officeDocument/2006/relationships">
+  <p:cSld>
+    <p:spTree>
+      <p:nvGrpSpPr>
+        <p:cNvPr id="1" name=""/>
+        <p:cNvGrpSpPr/>
+        <p:nvPr/>
+      </p:nvGrpSpPr>
+      <p:grpSpPr>
+        <a:xfrm>
+          <a:off x="0" y="0"/>
+          <a:ext cx="0" cy="0"/>
+          <a:chOff x="0" y="0"/>
+          <a:chExt cx="0" cy="0"/>
+        </a:xfrm>
+      </p:grpSpPr>
+      <p:sp>
+        <p:nvSpPr>
+          <p:cNvPr id="2" name="Slide Image Placeholder 1"/>
+          <p:cNvSpPr>
+            <a:spLocks noGrp="1"/>
+          </p:cNvSpPr>
+          <p:nvPr>
+            <p:ph type="sldImg" idx="2"/>
+          </p:nvPr>
+        </p:nvSpPr>
+        <p:spPr/>
+      </p:sp>
+      <p:sp>
+        <p:nvSpPr>
+          <p:cNvPr id="3" name="Notes Placeholder 2"/>
+          <p:cNvSpPr>
+            <a:spLocks noGrp="1"/>
+          </p:cNvSpPr>
+          <p:nvPr>
+            <p:ph type="body" idx="3" sz="quarter"/>
+          </p:nvPr>
+        </p:nvSpPr>
+        <p:spPr/>
+        <p:txBody>
+          <a:bodyPr/>
+          <a:lstStyle/>
+          <a:p>
+            <a:r>
+              <a:t>Common traps: celebrating HPWL while cells pile into one bin; ignoring fixed pads A and D; mixing bbox and clique models in one report; keeping only the final SA iterate instead of the best; and forgetting that timing weights change the objective, not just the label.</a:t>
+            </a:r>
+          </a:p>
+        </p:txBody>
+      </p:sp>
+      <p:sp>
+        <p:nvSpPr>
+          <p:cNvPr id="4" name="Slide Number Placeholder 3"/>
+          <p:cNvSpPr>
+            <a:spLocks noGrp="1"/>
+          </p:cNvSpPr>
+          <p:nvPr>
+            <p:ph type="sldNum" idx="5" sz="quarter"/>
+          </p:nvPr>
+        </p:nvSpPr>
+        <p:spPr/>
+      </p:sp>
+    </p:spTree>
+  </p:cSld>
+  <p:clrMapOvr>
+    <a:masterClrMapping/>
+  </p:clrMapOvr>
+</p:notes>
+</file>
+
+<file path=ppt/notesSlides/notesSlide13.xml><?xml version="1.0" encoding="utf-8"?>
+<p:notes xmlns:a="http://schemas.openxmlformats.org/drawingml/2006/main" xmlns:p="http://schemas.openxmlformats.org/presentationml/2006/main" xmlns:r="http://schemas.openxmlformats.org/officeDocument/2006/relationships">
+  <p:cSld>
+    <p:spTree>
+      <p:nvGrpSpPr>
+        <p:cNvPr id="1" name=""/>
+        <p:cNvGrpSpPr/>
+        <p:nvPr/>
+      </p:nvGrpSpPr>
+      <p:grpSpPr>
+        <a:xfrm>
+          <a:off x="0" y="0"/>
+          <a:ext cx="0" cy="0"/>
+          <a:chOff x="0" y="0"/>
+          <a:chExt cx="0" cy="0"/>
+        </a:xfrm>
+      </p:grpSpPr>
+      <p:sp>
+        <p:nvSpPr>
+          <p:cNvPr id="2" name="Slide Image Placeholder 1"/>
+          <p:cNvSpPr>
+            <a:spLocks noGrp="1"/>
+          </p:cNvSpPr>
+          <p:nvPr>
+            <p:ph type="sldImg" idx="2"/>
+          </p:nvPr>
+        </p:nvSpPr>
+        <p:spPr/>
+      </p:sp>
+      <p:sp>
+        <p:nvSpPr>
+          <p:cNvPr id="3" name="Notes Placeholder 2"/>
+          <p:cNvSpPr>
+            <a:spLocks noGrp="1"/>
+          </p:cNvSpPr>
+          <p:nvPr>
+            <p:ph type="body" idx="3" sz="quarter"/>
+          </p:nvPr>
+        </p:nvSpPr>
+        <p:spPr/>
+        <p:txBody>
+          <a:bodyPr/>
+          <a:lstStyle/>
+          <a:p>
+            <a:r>
               <a:t>Complete the checklist for at least one track—preferably both. Implement until your metrics match the starter goldens. When you’re ready, take the short quiz, then continue to the next module.</a:t>
             </a:r>
           </a:p>
@@ -725,12 +868,6 @@
               <a:t>While any pair sits closer than minDist, push them along their separation vector. Finish with a deterministic repair pass so the result is stable. Spreading is a legality proxy—not full row-site legalization.</a:t>
             </a:r>
           </a:p>
-          <a:p/>
-          <a:p>
-            <a:r>
-              <a:t>&lt;!-- algorithm-walkthrough --&gt;</a:t>
-            </a:r>
-          </a:p>
         </p:txBody>
       </p:sp>
       <p:sp>
@@ -798,7 +935,13 @@
           <a:lstStyle/>
           <a:p>
             <a:r>
-              <a:t>The overlap demo stacks A, B, and C on (4,4). Min pairwise distance is zero—illegal for any site-aware flow, perfect for a spreading lesson.</a:t>
+              <a:t>Spread lite pushes close pairs apart until every pairwise distance clears a minimum. It is overlap relief, not site legalization.</a:t>
+            </a:r>
+          </a:p>
+          <a:p/>
+          <a:p>
+            <a:r>
+              <a:t>Open this module's examples file and find the Pseudocode section. That written sketch is what you implement on the implement track and what the browser challenges measure.</a:t>
             </a:r>
           </a:p>
         </p:txBody>
@@ -868,7 +1011,7 @@
           <a:lstStyle/>
           <a:p>
             <a:r>
-              <a:t>While any pair sits closer than minDist, push them along their separation vector. Repeated passes peel the triple stack into distinct points.</a:t>
+              <a:t>Start from the triple-overlap demo, run the spreader with minimum distance zero point five, and confirm pairs clear without exploding HPWL.</a:t>
             </a:r>
           </a:p>
         </p:txBody>
@@ -938,7 +1081,7 @@
           <a:lstStyle/>
           <a:p>
             <a:r>
-              <a:t>The lite spreader separates A, B, and C until every pair clears about zero point five. D, E, and F barely move.</a:t>
+              <a:t>The overlap demo stacks A, B, and C on (4,4). Min pairwise distance is zero—illegal for any site-aware flow, perfect for a spreading lesson.</a:t>
             </a:r>
           </a:p>
         </p:txBody>
@@ -1008,7 +1151,7 @@
           <a:lstStyle/>
           <a:p>
             <a:r>
-              <a:t>Clearing min distance is not row legalization or site snapping. It is a teaching stand-in so overlap stops hiding behind pretty HPWL.</a:t>
+              <a:t>While any pair sits closer than minDist, push them along their separation vector. Repeated passes peel the triple stack into distinct points.</a:t>
             </a:r>
           </a:p>
         </p:txBody>
@@ -1078,13 +1221,7 @@
           <a:lstStyle/>
           <a:p>
             <a:r>
-              <a:t>Start from the triple-overlap seed, spread to minDist zero point five, and confirm every pair clears the threshold. Then revisit wirelength.</a:t>
-            </a:r>
-          </a:p>
-          <a:p/>
-          <a:p>
-            <a:r>
-              <a:t>&lt;!-- /algorithm-walkthrough --&gt;</a:t>
+              <a:t>The lite spreader separates A, B, and C until every pair clears about zero point five. D, E, and F barely move.</a:t>
             </a:r>
           </a:p>
         </p:txBody>
@@ -1154,7 +1291,7 @@
           <a:lstStyle/>
           <a:p>
             <a:r>
-              <a:t>In the browser lab track, open the **spread-legalize-lite** lab from the tools shelf. Load the starter placement, run the algorithm once, and read HPWL—and density when the panel shows it. Work the challenges that lock the goldens, then come back to implement the same loop yourself.</a:t>
+              <a:t>Clearing min distance is not row legalization or site snapping. It is a teaching stand-in so overlap stops hiding behind pretty HPWL.</a:t>
             </a:r>
           </a:p>
         </p:txBody>
@@ -1224,7 +1361,7 @@
           <a:lstStyle/>
           <a:p>
             <a:r>
-              <a:t>In the implement track, open this module’s examples and the course `common/` solvers. Parse `tiny_place.json`, run the algorithm with a deterministic seed, and print coordinates plus HPWL. Match the browser goldens before you claim the checklist.</a:t>
+              <a:t>Start from the triple-overlap seed, spread to minDist zero point five, and confirm every pair clears the threshold. Then revisit wirelength.</a:t>
             </a:r>
           </a:p>
         </p:txBody>
@@ -4382,21 +4519,45 @@
                 </a:solidFill>
                 <a:latin typeface="Calibri"/>
               </a:rPr>
-              <a:t>Pitfalls</a:t>
-            </a:r>
-          </a:p>
-        </p:txBody>
-      </p:sp>
-      <p:sp>
-        <p:nvSpPr>
-          <p:cNvPr id="3" name="TextBox 2"/>
+              <a:t>Relieve overlap before celebrating WL</a:t>
+            </a:r>
+          </a:p>
+        </p:txBody>
+      </p:sp>
+      <p:pic>
+        <p:nvPicPr>
+          <p:cNvPr id="3" name="Picture 2" descr="05-takeaway.png"/>
+          <p:cNvPicPr>
+            <a:picLocks noChangeAspect="1"/>
+          </p:cNvPicPr>
+          <p:nvPr/>
+        </p:nvPicPr>
+        <p:blipFill>
+          <a:blip r:embed="rId2"/>
+          <a:stretch>
+            <a:fillRect/>
+          </a:stretch>
+        </p:blipFill>
+        <p:spPr>
+          <a:xfrm>
+            <a:off x="548640" y="1143000"/>
+            <a:ext cx="9404113" cy="4572000"/>
+          </a:xfrm>
+          <a:prstGeom prst="rect">
+            <a:avLst/>
+          </a:prstGeom>
+        </p:spPr>
+      </p:pic>
+      <p:sp>
+        <p:nvSpPr>
+          <p:cNvPr id="4" name="TextBox 3"/>
           <p:cNvSpPr txBox="1"/>
           <p:nvPr/>
         </p:nvSpPr>
         <p:spPr>
           <a:xfrm>
-            <a:off x="548640" y="1234440"/>
-            <a:ext cx="11064240" cy="4937760"/>
+            <a:off x="548640" y="5897880"/>
+            <a:ext cx="11064240" cy="411480"/>
           </a:xfrm>
           <a:prstGeom prst="rect">
             <a:avLst/>
@@ -4409,32 +4570,26 @@
           </a:bodyPr>
           <a:lstStyle/>
           <a:p>
-            <a:pPr lvl="0" marL="457200" indent="-228600">
-              <a:buFont typeface="Calibri"/>
-              <a:spcAft>
-                <a:spcPts val="1000"/>
-              </a:spcAft>
-              <a:buSzPct val="100000"/>
-              <a:buChar char="•"/>
+            <a:pPr>
               <a:lnSpc>
                 <a:spcPts val="2200"/>
               </a:lnSpc>
             </a:pPr>
             <a:r>
-              <a:rPr sz="2000" b="0">
+              <a:rPr sz="1200" b="0">
                 <a:solidFill>
                   <a:srgbClr val="333333"/>
                 </a:solidFill>
                 <a:latin typeface="Calibri"/>
               </a:rPr>
-              <a:t>Common traps</a:t>
-            </a:r>
-          </a:p>
-        </p:txBody>
-      </p:sp>
-      <p:sp>
-        <p:nvSpPr>
-          <p:cNvPr id="4" name="TextBox 3"/>
+              <a:t>Relieve overlap before celebrating WL</a:t>
+            </a:r>
+          </a:p>
+        </p:txBody>
+      </p:sp>
+      <p:sp>
+        <p:nvSpPr>
+          <p:cNvPr id="5" name="TextBox 4"/>
           <p:cNvSpPr txBox="1"/>
           <p:nvPr/>
         </p:nvSpPr>
@@ -4523,6 +4678,535 @@
                 </a:solidFill>
                 <a:latin typeface="Calibri"/>
               </a:rPr>
+              <a:t>Browser lab track</a:t>
+            </a:r>
+          </a:p>
+        </p:txBody>
+      </p:sp>
+      <p:sp>
+        <p:nvSpPr>
+          <p:cNvPr id="3" name="TextBox 2"/>
+          <p:cNvSpPr txBox="1"/>
+          <p:nvPr/>
+        </p:nvSpPr>
+        <p:spPr>
+          <a:xfrm>
+            <a:off x="548640" y="1234440"/>
+            <a:ext cx="11064240" cy="4937760"/>
+          </a:xfrm>
+          <a:prstGeom prst="rect">
+            <a:avLst/>
+          </a:prstGeom>
+          <a:noFill/>
+        </p:spPr>
+        <p:txBody>
+          <a:bodyPr wrap="square">
+            <a:noAutofit/>
+          </a:bodyPr>
+          <a:lstStyle/>
+          <a:p>
+            <a:pPr lvl="0" marL="457200" indent="-228600">
+              <a:buFont typeface="Calibri"/>
+              <a:spcAft>
+                <a:spcPts val="1000"/>
+              </a:spcAft>
+              <a:buSzPct val="100000"/>
+              <a:buChar char="•"/>
+              <a:lnSpc>
+                <a:spcPts val="2200"/>
+              </a:lnSpc>
+            </a:pPr>
+            <a:r>
+              <a:rPr sz="2000" b="0">
+                <a:solidFill>
+                  <a:srgbClr val="333333"/>
+                </a:solidFill>
+                <a:latin typeface="Calibri"/>
+              </a:rPr>
+              <a:t>In the browser lab track, open the </a:t>
+            </a:r>
+            <a:r>
+              <a:rPr sz="2000" b="1">
+                <a:solidFill>
+                  <a:srgbClr val="333333"/>
+                </a:solidFill>
+                <a:latin typeface="Calibri"/>
+              </a:rPr>
+              <a:t>spread-legalize-lite</a:t>
+            </a:r>
+            <a:r>
+              <a:rPr sz="2000" b="0">
+                <a:solidFill>
+                  <a:srgbClr val="333333"/>
+                </a:solidFill>
+                <a:latin typeface="Calibri"/>
+              </a:rPr>
+              <a:t> lab from the tools shelf</a:t>
+            </a:r>
+          </a:p>
+          <a:p>
+            <a:pPr lvl="0" marL="457200" indent="-228600">
+              <a:buFont typeface="Calibri"/>
+              <a:spcAft>
+                <a:spcPts val="1000"/>
+              </a:spcAft>
+              <a:buSzPct val="100000"/>
+              <a:buChar char="•"/>
+              <a:lnSpc>
+                <a:spcPts val="2200"/>
+              </a:lnSpc>
+            </a:pPr>
+            <a:r>
+              <a:rPr sz="2000" b="0">
+                <a:solidFill>
+                  <a:srgbClr val="333333"/>
+                </a:solidFill>
+                <a:latin typeface="Calibri"/>
+              </a:rPr>
+              <a:t>Load the starter placement, run the algorithm once</a:t>
+            </a:r>
+          </a:p>
+          <a:p>
+            <a:pPr lvl="0" marL="457200" indent="-228600">
+              <a:buFont typeface="Calibri"/>
+              <a:spcAft>
+                <a:spcPts val="1000"/>
+              </a:spcAft>
+              <a:buSzPct val="100000"/>
+              <a:buChar char="•"/>
+              <a:lnSpc>
+                <a:spcPts val="2200"/>
+              </a:lnSpc>
+            </a:pPr>
+            <a:r>
+              <a:rPr sz="2000" b="0">
+                <a:solidFill>
+                  <a:srgbClr val="333333"/>
+                </a:solidFill>
+                <a:latin typeface="Calibri"/>
+              </a:rPr>
+              <a:t>Work the challenges that lock the goldens</a:t>
+            </a:r>
+          </a:p>
+        </p:txBody>
+      </p:sp>
+      <p:sp>
+        <p:nvSpPr>
+          <p:cNvPr id="4" name="TextBox 3"/>
+          <p:cNvSpPr txBox="1"/>
+          <p:nvPr/>
+        </p:nvSpPr>
+        <p:spPr>
+          <a:xfrm>
+            <a:off x="548640" y="6355080"/>
+            <a:ext cx="11064240" cy="320040"/>
+          </a:xfrm>
+          <a:prstGeom prst="rect">
+            <a:avLst/>
+          </a:prstGeom>
+          <a:noFill/>
+        </p:spPr>
+        <p:txBody>
+          <a:bodyPr wrap="square">
+            <a:noAutofit/>
+          </a:bodyPr>
+          <a:lstStyle/>
+          <a:p>
+            <a:pPr algn="r">
+              <a:lnSpc>
+                <a:spcPts val="2200"/>
+              </a:lnSpc>
+              <a:defRPr sz="1000" b="0">
+                <a:solidFill>
+                  <a:srgbClr val="666666"/>
+                </a:solidFill>
+                <a:latin typeface="Calibri"/>
+              </a:defRPr>
+            </a:pPr>
+            <a:r>
+              <a:t>learn_placement — 03 spread legalize lite</a:t>
+            </a:r>
+          </a:p>
+        </p:txBody>
+      </p:sp>
+    </p:spTree>
+  </p:cSld>
+  <p:clrMapOvr>
+    <a:masterClrMapping/>
+  </p:clrMapOvr>
+</p:sld>
+</file>
+
+<file path=ppt/slides/slide12.xml><?xml version="1.0" encoding="utf-8"?>
+<p:sld xmlns:a="http://schemas.openxmlformats.org/drawingml/2006/main" xmlns:p="http://schemas.openxmlformats.org/presentationml/2006/main" xmlns:r="http://schemas.openxmlformats.org/officeDocument/2006/relationships">
+  <p:cSld>
+    <p:spTree>
+      <p:nvGrpSpPr>
+        <p:cNvPr id="1" name=""/>
+        <p:cNvGrpSpPr/>
+        <p:nvPr/>
+      </p:nvGrpSpPr>
+      <p:grpSpPr/>
+      <p:sp>
+        <p:nvSpPr>
+          <p:cNvPr id="2" name="TextBox 1"/>
+          <p:cNvSpPr txBox="1"/>
+          <p:nvPr/>
+        </p:nvSpPr>
+        <p:spPr>
+          <a:xfrm>
+            <a:off x="548640" y="411480"/>
+            <a:ext cx="11064240" cy="777240"/>
+          </a:xfrm>
+          <a:prstGeom prst="rect">
+            <a:avLst/>
+          </a:prstGeom>
+          <a:noFill/>
+        </p:spPr>
+        <p:txBody>
+          <a:bodyPr wrap="square">
+            <a:noAutofit/>
+          </a:bodyPr>
+          <a:lstStyle/>
+          <a:p>
+            <a:pPr>
+              <a:lnSpc>
+                <a:spcPts val="2200"/>
+              </a:lnSpc>
+            </a:pPr>
+            <a:r>
+              <a:rPr sz="2800" b="1">
+                <a:solidFill>
+                  <a:srgbClr val="1A1A2E"/>
+                </a:solidFill>
+                <a:latin typeface="Calibri"/>
+              </a:rPr>
+              <a:t>Implement track</a:t>
+            </a:r>
+          </a:p>
+        </p:txBody>
+      </p:sp>
+      <p:sp>
+        <p:nvSpPr>
+          <p:cNvPr id="3" name="TextBox 2"/>
+          <p:cNvSpPr txBox="1"/>
+          <p:nvPr/>
+        </p:nvSpPr>
+        <p:spPr>
+          <a:xfrm>
+            <a:off x="548640" y="1234440"/>
+            <a:ext cx="11064240" cy="4937760"/>
+          </a:xfrm>
+          <a:prstGeom prst="rect">
+            <a:avLst/>
+          </a:prstGeom>
+          <a:noFill/>
+        </p:spPr>
+        <p:txBody>
+          <a:bodyPr wrap="square">
+            <a:noAutofit/>
+          </a:bodyPr>
+          <a:lstStyle/>
+          <a:p>
+            <a:pPr lvl="0" marL="457200" indent="-228600">
+              <a:buFont typeface="Calibri"/>
+              <a:spcAft>
+                <a:spcPts val="1000"/>
+              </a:spcAft>
+              <a:buSzPct val="100000"/>
+              <a:buChar char="•"/>
+              <a:lnSpc>
+                <a:spcPts val="2200"/>
+              </a:lnSpc>
+            </a:pPr>
+            <a:r>
+              <a:rPr sz="2000" b="0">
+                <a:solidFill>
+                  <a:srgbClr val="333333"/>
+                </a:solidFill>
+                <a:latin typeface="Calibri"/>
+              </a:rPr>
+              <a:t>In the implement track</a:t>
+            </a:r>
+          </a:p>
+          <a:p>
+            <a:pPr lvl="0" marL="457200" indent="-228600">
+              <a:buFont typeface="Calibri"/>
+              <a:spcAft>
+                <a:spcPts val="1000"/>
+              </a:spcAft>
+              <a:buSzPct val="100000"/>
+              <a:buChar char="•"/>
+              <a:lnSpc>
+                <a:spcPts val="2200"/>
+              </a:lnSpc>
+            </a:pPr>
+            <a:r>
+              <a:rPr sz="2000" b="0">
+                <a:solidFill>
+                  <a:srgbClr val="333333"/>
+                </a:solidFill>
+                <a:latin typeface="Calibri"/>
+              </a:rPr>
+              <a:t>Parse `tiny_place.json`, run the algorithm with a deterministic seed</a:t>
+            </a:r>
+          </a:p>
+          <a:p>
+            <a:pPr lvl="0" marL="457200" indent="-228600">
+              <a:buFont typeface="Calibri"/>
+              <a:spcAft>
+                <a:spcPts val="1000"/>
+              </a:spcAft>
+              <a:buSzPct val="100000"/>
+              <a:buChar char="•"/>
+              <a:lnSpc>
+                <a:spcPts val="2200"/>
+              </a:lnSpc>
+            </a:pPr>
+            <a:r>
+              <a:rPr sz="2000" b="0">
+                <a:solidFill>
+                  <a:srgbClr val="333333"/>
+                </a:solidFill>
+                <a:latin typeface="Calibri"/>
+              </a:rPr>
+              <a:t>Match the browser goldens before you claim the checklist</a:t>
+            </a:r>
+          </a:p>
+        </p:txBody>
+      </p:sp>
+      <p:sp>
+        <p:nvSpPr>
+          <p:cNvPr id="4" name="TextBox 3"/>
+          <p:cNvSpPr txBox="1"/>
+          <p:nvPr/>
+        </p:nvSpPr>
+        <p:spPr>
+          <a:xfrm>
+            <a:off x="548640" y="6355080"/>
+            <a:ext cx="11064240" cy="320040"/>
+          </a:xfrm>
+          <a:prstGeom prst="rect">
+            <a:avLst/>
+          </a:prstGeom>
+          <a:noFill/>
+        </p:spPr>
+        <p:txBody>
+          <a:bodyPr wrap="square">
+            <a:noAutofit/>
+          </a:bodyPr>
+          <a:lstStyle/>
+          <a:p>
+            <a:pPr algn="r">
+              <a:lnSpc>
+                <a:spcPts val="2200"/>
+              </a:lnSpc>
+              <a:defRPr sz="1000" b="0">
+                <a:solidFill>
+                  <a:srgbClr val="666666"/>
+                </a:solidFill>
+                <a:latin typeface="Calibri"/>
+              </a:defRPr>
+            </a:pPr>
+            <a:r>
+              <a:t>learn_placement — 03 spread legalize lite</a:t>
+            </a:r>
+          </a:p>
+        </p:txBody>
+      </p:sp>
+    </p:spTree>
+  </p:cSld>
+  <p:clrMapOvr>
+    <a:masterClrMapping/>
+  </p:clrMapOvr>
+</p:sld>
+</file>
+
+<file path=ppt/slides/slide13.xml><?xml version="1.0" encoding="utf-8"?>
+<p:sld xmlns:a="http://schemas.openxmlformats.org/drawingml/2006/main" xmlns:p="http://schemas.openxmlformats.org/presentationml/2006/main" xmlns:r="http://schemas.openxmlformats.org/officeDocument/2006/relationships">
+  <p:cSld>
+    <p:spTree>
+      <p:nvGrpSpPr>
+        <p:cNvPr id="1" name=""/>
+        <p:cNvGrpSpPr/>
+        <p:nvPr/>
+      </p:nvGrpSpPr>
+      <p:grpSpPr/>
+      <p:sp>
+        <p:nvSpPr>
+          <p:cNvPr id="2" name="TextBox 1"/>
+          <p:cNvSpPr txBox="1"/>
+          <p:nvPr/>
+        </p:nvSpPr>
+        <p:spPr>
+          <a:xfrm>
+            <a:off x="548640" y="411480"/>
+            <a:ext cx="11064240" cy="777240"/>
+          </a:xfrm>
+          <a:prstGeom prst="rect">
+            <a:avLst/>
+          </a:prstGeom>
+          <a:noFill/>
+        </p:spPr>
+        <p:txBody>
+          <a:bodyPr wrap="square">
+            <a:noAutofit/>
+          </a:bodyPr>
+          <a:lstStyle/>
+          <a:p>
+            <a:pPr>
+              <a:lnSpc>
+                <a:spcPts val="2200"/>
+              </a:lnSpc>
+            </a:pPr>
+            <a:r>
+              <a:rPr sz="2800" b="1">
+                <a:solidFill>
+                  <a:srgbClr val="1A1A2E"/>
+                </a:solidFill>
+                <a:latin typeface="Calibri"/>
+              </a:rPr>
+              <a:t>Pitfalls</a:t>
+            </a:r>
+          </a:p>
+        </p:txBody>
+      </p:sp>
+      <p:sp>
+        <p:nvSpPr>
+          <p:cNvPr id="3" name="TextBox 2"/>
+          <p:cNvSpPr txBox="1"/>
+          <p:nvPr/>
+        </p:nvSpPr>
+        <p:spPr>
+          <a:xfrm>
+            <a:off x="548640" y="1234440"/>
+            <a:ext cx="11064240" cy="4937760"/>
+          </a:xfrm>
+          <a:prstGeom prst="rect">
+            <a:avLst/>
+          </a:prstGeom>
+          <a:noFill/>
+        </p:spPr>
+        <p:txBody>
+          <a:bodyPr wrap="square">
+            <a:noAutofit/>
+          </a:bodyPr>
+          <a:lstStyle/>
+          <a:p>
+            <a:pPr lvl="0" marL="457200" indent="-228600">
+              <a:buFont typeface="Calibri"/>
+              <a:spcAft>
+                <a:spcPts val="1000"/>
+              </a:spcAft>
+              <a:buSzPct val="100000"/>
+              <a:buChar char="•"/>
+              <a:lnSpc>
+                <a:spcPts val="2200"/>
+              </a:lnSpc>
+            </a:pPr>
+            <a:r>
+              <a:rPr sz="2000" b="0">
+                <a:solidFill>
+                  <a:srgbClr val="333333"/>
+                </a:solidFill>
+                <a:latin typeface="Calibri"/>
+              </a:rPr>
+              <a:t>Common traps</a:t>
+            </a:r>
+          </a:p>
+        </p:txBody>
+      </p:sp>
+      <p:sp>
+        <p:nvSpPr>
+          <p:cNvPr id="4" name="TextBox 3"/>
+          <p:cNvSpPr txBox="1"/>
+          <p:nvPr/>
+        </p:nvSpPr>
+        <p:spPr>
+          <a:xfrm>
+            <a:off x="548640" y="6355080"/>
+            <a:ext cx="11064240" cy="320040"/>
+          </a:xfrm>
+          <a:prstGeom prst="rect">
+            <a:avLst/>
+          </a:prstGeom>
+          <a:noFill/>
+        </p:spPr>
+        <p:txBody>
+          <a:bodyPr wrap="square">
+            <a:noAutofit/>
+          </a:bodyPr>
+          <a:lstStyle/>
+          <a:p>
+            <a:pPr algn="r">
+              <a:lnSpc>
+                <a:spcPts val="2200"/>
+              </a:lnSpc>
+              <a:defRPr sz="1000" b="0">
+                <a:solidFill>
+                  <a:srgbClr val="666666"/>
+                </a:solidFill>
+                <a:latin typeface="Calibri"/>
+              </a:defRPr>
+            </a:pPr>
+            <a:r>
+              <a:t>learn_placement — 03 spread legalize lite</a:t>
+            </a:r>
+          </a:p>
+        </p:txBody>
+      </p:sp>
+    </p:spTree>
+  </p:cSld>
+  <p:clrMapOvr>
+    <a:masterClrMapping/>
+  </p:clrMapOvr>
+</p:sld>
+</file>
+
+<file path=ppt/slides/slide14.xml><?xml version="1.0" encoding="utf-8"?>
+<p:sld xmlns:a="http://schemas.openxmlformats.org/drawingml/2006/main" xmlns:p="http://schemas.openxmlformats.org/presentationml/2006/main" xmlns:r="http://schemas.openxmlformats.org/officeDocument/2006/relationships">
+  <p:cSld>
+    <p:spTree>
+      <p:nvGrpSpPr>
+        <p:cNvPr id="1" name=""/>
+        <p:cNvGrpSpPr/>
+        <p:nvPr/>
+      </p:nvGrpSpPr>
+      <p:grpSpPr/>
+      <p:sp>
+        <p:nvSpPr>
+          <p:cNvPr id="2" name="TextBox 1"/>
+          <p:cNvSpPr txBox="1"/>
+          <p:nvPr/>
+        </p:nvSpPr>
+        <p:spPr>
+          <a:xfrm>
+            <a:off x="548640" y="411480"/>
+            <a:ext cx="11064240" cy="777240"/>
+          </a:xfrm>
+          <a:prstGeom prst="rect">
+            <a:avLst/>
+          </a:prstGeom>
+          <a:noFill/>
+        </p:spPr>
+        <p:txBody>
+          <a:bodyPr wrap="square">
+            <a:noAutofit/>
+          </a:bodyPr>
+          <a:lstStyle/>
+          <a:p>
+            <a:pPr>
+              <a:lnSpc>
+                <a:spcPts val="2200"/>
+              </a:lnSpc>
+            </a:pPr>
+            <a:r>
+              <a:rPr sz="2800" b="1">
+                <a:solidFill>
+                  <a:srgbClr val="1A1A2E"/>
+                </a:solidFill>
+                <a:latin typeface="Calibri"/>
+              </a:rPr>
               <a:t>Your turn</a:t>
             </a:r>
           </a:p>
@@ -4800,6 +5484,125 @@
               <a:t>Spreading is a legality proxy, not full row-site legalization</a:t>
             </a:r>
           </a:p>
+        </p:txBody>
+      </p:sp>
+      <p:sp>
+        <p:nvSpPr>
+          <p:cNvPr id="4" name="TextBox 3"/>
+          <p:cNvSpPr txBox="1"/>
+          <p:nvPr/>
+        </p:nvSpPr>
+        <p:spPr>
+          <a:xfrm>
+            <a:off x="548640" y="6355080"/>
+            <a:ext cx="11064240" cy="320040"/>
+          </a:xfrm>
+          <a:prstGeom prst="rect">
+            <a:avLst/>
+          </a:prstGeom>
+          <a:noFill/>
+        </p:spPr>
+        <p:txBody>
+          <a:bodyPr wrap="square">
+            <a:noAutofit/>
+          </a:bodyPr>
+          <a:lstStyle/>
+          <a:p>
+            <a:pPr algn="r">
+              <a:lnSpc>
+                <a:spcPts val="2200"/>
+              </a:lnSpc>
+              <a:defRPr sz="1000" b="0">
+                <a:solidFill>
+                  <a:srgbClr val="666666"/>
+                </a:solidFill>
+                <a:latin typeface="Calibri"/>
+              </a:defRPr>
+            </a:pPr>
+            <a:r>
+              <a:t>learn_placement — 03 spread legalize lite</a:t>
+            </a:r>
+          </a:p>
+        </p:txBody>
+      </p:sp>
+    </p:spTree>
+  </p:cSld>
+  <p:clrMapOvr>
+    <a:masterClrMapping/>
+  </p:clrMapOvr>
+</p:sld>
+</file>
+
+<file path=ppt/slides/slide3.xml><?xml version="1.0" encoding="utf-8"?>
+<p:sld xmlns:a="http://schemas.openxmlformats.org/drawingml/2006/main" xmlns:p="http://schemas.openxmlformats.org/presentationml/2006/main" xmlns:r="http://schemas.openxmlformats.org/officeDocument/2006/relationships">
+  <p:cSld>
+    <p:spTree>
+      <p:nvGrpSpPr>
+        <p:cNvPr id="1" name=""/>
+        <p:cNvGrpSpPr/>
+        <p:nvPr/>
+      </p:nvGrpSpPr>
+      <p:grpSpPr/>
+      <p:sp>
+        <p:nvSpPr>
+          <p:cNvPr id="2" name="TextBox 1"/>
+          <p:cNvSpPr txBox="1"/>
+          <p:nvPr/>
+        </p:nvSpPr>
+        <p:spPr>
+          <a:xfrm>
+            <a:off x="548640" y="411480"/>
+            <a:ext cx="11064240" cy="777240"/>
+          </a:xfrm>
+          <a:prstGeom prst="rect">
+            <a:avLst/>
+          </a:prstGeom>
+          <a:noFill/>
+        </p:spPr>
+        <p:txBody>
+          <a:bodyPr wrap="square">
+            <a:noAutofit/>
+          </a:bodyPr>
+          <a:lstStyle/>
+          <a:p>
+            <a:pPr>
+              <a:lnSpc>
+                <a:spcPts val="2200"/>
+              </a:lnSpc>
+            </a:pPr>
+            <a:r>
+              <a:rPr sz="2800" b="1">
+                <a:solidFill>
+                  <a:srgbClr val="1A1A2E"/>
+                </a:solidFill>
+                <a:latin typeface="Calibri"/>
+              </a:rPr>
+              <a:t>Pseudocode</a:t>
+            </a:r>
+          </a:p>
+        </p:txBody>
+      </p:sp>
+      <p:sp>
+        <p:nvSpPr>
+          <p:cNvPr id="3" name="TextBox 2"/>
+          <p:cNvSpPr txBox="1"/>
+          <p:nvPr/>
+        </p:nvSpPr>
+        <p:spPr>
+          <a:xfrm>
+            <a:off x="548640" y="1234440"/>
+            <a:ext cx="11064240" cy="4937760"/>
+          </a:xfrm>
+          <a:prstGeom prst="rect">
+            <a:avLst/>
+          </a:prstGeom>
+          <a:noFill/>
+        </p:spPr>
+        <p:txBody>
+          <a:bodyPr wrap="square">
+            <a:noAutofit/>
+          </a:bodyPr>
+          <a:lstStyle/>
           <a:p>
             <a:pPr lvl="0" marL="457200" indent="-228600">
               <a:buFont typeface="Calibri"/>
@@ -4819,7 +5622,73 @@
                 </a:solidFill>
                 <a:latin typeface="Calibri"/>
               </a:rPr>
-              <a:t>&lt;!-- algorithm-walkthrough --&gt;</a:t>
+              <a:t>Spread lite pushes close pairs apart until every pairwise distance clears a minimum</a:t>
+            </a:r>
+          </a:p>
+          <a:p>
+            <a:pPr lvl="0" marL="457200" indent="-228600">
+              <a:buFont typeface="Calibri"/>
+              <a:spcAft>
+                <a:spcPts val="1000"/>
+              </a:spcAft>
+              <a:buSzPct val="100000"/>
+              <a:buChar char="•"/>
+              <a:lnSpc>
+                <a:spcPts val="2200"/>
+              </a:lnSpc>
+            </a:pPr>
+            <a:r>
+              <a:rPr sz="2000" b="0">
+                <a:solidFill>
+                  <a:srgbClr val="333333"/>
+                </a:solidFill>
+                <a:latin typeface="Calibri"/>
+              </a:rPr>
+              <a:t>It is overlap relief, not site legalization</a:t>
+            </a:r>
+          </a:p>
+          <a:p>
+            <a:pPr lvl="0" marL="457200" indent="-228600">
+              <a:buFont typeface="Calibri"/>
+              <a:spcAft>
+                <a:spcPts val="1000"/>
+              </a:spcAft>
+              <a:buSzPct val="100000"/>
+              <a:buChar char="•"/>
+              <a:lnSpc>
+                <a:spcPts val="2200"/>
+              </a:lnSpc>
+            </a:pPr>
+            <a:r>
+              <a:rPr sz="2000" b="0">
+                <a:solidFill>
+                  <a:srgbClr val="333333"/>
+                </a:solidFill>
+                <a:latin typeface="Calibri"/>
+              </a:rPr>
+              <a:t>Open this module's examples file and find the Pseudocode section</a:t>
+            </a:r>
+          </a:p>
+          <a:p>
+            <a:pPr lvl="0" marL="457200" indent="-228600">
+              <a:buFont typeface="Calibri"/>
+              <a:spcAft>
+                <a:spcPts val="1000"/>
+              </a:spcAft>
+              <a:buSzPct val="100000"/>
+              <a:buChar char="•"/>
+              <a:lnSpc>
+                <a:spcPts val="2200"/>
+              </a:lnSpc>
+            </a:pPr>
+            <a:r>
+              <a:rPr sz="2000" b="0">
+                <a:solidFill>
+                  <a:srgbClr val="333333"/>
+                </a:solidFill>
+                <a:latin typeface="Calibri"/>
+              </a:rPr>
+              <a:t>That written sketch is what you implement on the implement track and what the browser</a:t>
             </a:r>
           </a:p>
         </p:txBody>
@@ -4871,7 +5740,402 @@
 </p:sld>
 </file>
 
-<file path=ppt/slides/slide3.xml><?xml version="1.0" encoding="utf-8"?>
+<file path=ppt/slides/slide4.xml><?xml version="1.0" encoding="utf-8"?>
+<p:sld xmlns:a="http://schemas.openxmlformats.org/drawingml/2006/main" xmlns:p="http://schemas.openxmlformats.org/presentationml/2006/main" xmlns:r="http://schemas.openxmlformats.org/officeDocument/2006/relationships">
+  <p:cSld>
+    <p:spTree>
+      <p:nvGrpSpPr>
+        <p:cNvPr id="1" name=""/>
+        <p:cNvGrpSpPr/>
+        <p:nvPr/>
+      </p:nvGrpSpPr>
+      <p:grpSpPr/>
+      <p:sp>
+        <p:nvSpPr>
+          <p:cNvPr id="2" name="TextBox 1"/>
+          <p:cNvSpPr txBox="1"/>
+          <p:nvPr/>
+        </p:nvSpPr>
+        <p:spPr>
+          <a:xfrm>
+            <a:off x="548640" y="411480"/>
+            <a:ext cx="11064240" cy="777240"/>
+          </a:xfrm>
+          <a:prstGeom prst="rect">
+            <a:avLst/>
+          </a:prstGeom>
+          <a:noFill/>
+        </p:spPr>
+        <p:txBody>
+          <a:bodyPr wrap="square">
+            <a:noAutofit/>
+          </a:bodyPr>
+          <a:lstStyle/>
+          <a:p>
+            <a:pPr>
+              <a:lnSpc>
+                <a:spcPts val="2200"/>
+              </a:lnSpc>
+            </a:pPr>
+            <a:r>
+              <a:rPr sz="2800" b="1">
+                <a:solidFill>
+                  <a:srgbClr val="1A1A2E"/>
+                </a:solidFill>
+                <a:latin typeface="Calibri"/>
+              </a:rPr>
+              <a:t>Algorithm sketch</a:t>
+            </a:r>
+          </a:p>
+        </p:txBody>
+      </p:sp>
+      <p:sp>
+        <p:nvSpPr>
+          <p:cNvPr id="3" name="TextBox 2"/>
+          <p:cNvSpPr txBox="1"/>
+          <p:nvPr/>
+        </p:nvSpPr>
+        <p:spPr>
+          <a:xfrm>
+            <a:off x="548640" y="1234440"/>
+            <a:ext cx="11064240" cy="4937760"/>
+          </a:xfrm>
+          <a:prstGeom prst="rect">
+            <a:avLst/>
+          </a:prstGeom>
+          <a:noFill/>
+        </p:spPr>
+        <p:txBody>
+          <a:bodyPr wrap="square">
+            <a:noAutofit/>
+          </a:bodyPr>
+          <a:lstStyle/>
+          <a:p>
+            <a:pPr lvl="0" marL="457200" indent="-228600">
+              <a:buFont typeface="Calibri"/>
+              <a:spcAft>
+                <a:spcPts val="1000"/>
+              </a:spcAft>
+              <a:buSzPct val="100000"/>
+              <a:buChar char="•"/>
+              <a:lnSpc>
+                <a:spcPts val="2200"/>
+              </a:lnSpc>
+            </a:pPr>
+            <a:r>
+              <a:rPr sz="2000" b="0">
+                <a:solidFill>
+                  <a:srgbClr val="333333"/>
+                </a:solidFill>
+                <a:latin typeface="Calibri"/>
+              </a:rPr>
+              <a:t>Start from the triple-overlap demo, run the spreader with minimum distance zero point five</a:t>
+            </a:r>
+          </a:p>
+        </p:txBody>
+      </p:sp>
+      <p:sp>
+        <p:nvSpPr>
+          <p:cNvPr id="4" name="TextBox 3"/>
+          <p:cNvSpPr txBox="1"/>
+          <p:nvPr/>
+        </p:nvSpPr>
+        <p:spPr>
+          <a:xfrm>
+            <a:off x="548640" y="6355080"/>
+            <a:ext cx="11064240" cy="320040"/>
+          </a:xfrm>
+          <a:prstGeom prst="rect">
+            <a:avLst/>
+          </a:prstGeom>
+          <a:noFill/>
+        </p:spPr>
+        <p:txBody>
+          <a:bodyPr wrap="square">
+            <a:noAutofit/>
+          </a:bodyPr>
+          <a:lstStyle/>
+          <a:p>
+            <a:pPr algn="r">
+              <a:lnSpc>
+                <a:spcPts val="2200"/>
+              </a:lnSpc>
+              <a:defRPr sz="1000" b="0">
+                <a:solidFill>
+                  <a:srgbClr val="666666"/>
+                </a:solidFill>
+                <a:latin typeface="Calibri"/>
+              </a:defRPr>
+            </a:pPr>
+            <a:r>
+              <a:t>learn_placement — 03 spread legalize lite</a:t>
+            </a:r>
+          </a:p>
+        </p:txBody>
+      </p:sp>
+    </p:spTree>
+  </p:cSld>
+  <p:clrMapOvr>
+    <a:masterClrMapping/>
+  </p:clrMapOvr>
+</p:sld>
+</file>
+
+<file path=ppt/slides/slide5.xml><?xml version="1.0" encoding="utf-8"?>
+<p:sld xmlns:a="http://schemas.openxmlformats.org/drawingml/2006/main" xmlns:p="http://schemas.openxmlformats.org/presentationml/2006/main" xmlns:r="http://schemas.openxmlformats.org/officeDocument/2006/relationships">
+  <p:cSld>
+    <p:spTree>
+      <p:nvGrpSpPr>
+        <p:cNvPr id="1" name=""/>
+        <p:cNvGrpSpPr/>
+        <p:nvPr/>
+      </p:nvGrpSpPr>
+      <p:grpSpPr/>
+      <p:sp>
+        <p:nvSpPr>
+          <p:cNvPr id="2" name="TextBox 1"/>
+          <p:cNvSpPr txBox="1"/>
+          <p:nvPr/>
+        </p:nvSpPr>
+        <p:spPr>
+          <a:xfrm>
+            <a:off x="548640" y="411480"/>
+            <a:ext cx="11064240" cy="777240"/>
+          </a:xfrm>
+          <a:prstGeom prst="rect">
+            <a:avLst/>
+          </a:prstGeom>
+          <a:noFill/>
+        </p:spPr>
+        <p:txBody>
+          <a:bodyPr wrap="square">
+            <a:noAutofit/>
+          </a:bodyPr>
+          <a:lstStyle/>
+          <a:p>
+            <a:pPr>
+              <a:lnSpc>
+                <a:spcPts val="2200"/>
+              </a:lnSpc>
+            </a:pPr>
+            <a:r>
+              <a:rPr sz="2800" b="1">
+                <a:solidFill>
+                  <a:srgbClr val="1A1A2E"/>
+                </a:solidFill>
+                <a:latin typeface="Calibri"/>
+              </a:rPr>
+              <a:t>Algorithm sketch — try these</a:t>
+            </a:r>
+          </a:p>
+        </p:txBody>
+      </p:sp>
+      <p:sp>
+        <p:nvSpPr>
+          <p:cNvPr id="3" name="TextBox 2"/>
+          <p:cNvSpPr txBox="1"/>
+          <p:nvPr/>
+        </p:nvSpPr>
+        <p:spPr>
+          <a:xfrm>
+            <a:off x="548640" y="1143000"/>
+            <a:ext cx="11064240" cy="5029200"/>
+          </a:xfrm>
+          <a:prstGeom prst="rect">
+            <a:avLst/>
+          </a:prstGeom>
+          <a:solidFill>
+            <a:srgbClr val="F4F4F4"/>
+          </a:solidFill>
+        </p:spPr>
+        <p:txBody>
+          <a:bodyPr wrap="square">
+            <a:noAutofit/>
+          </a:bodyPr>
+          <a:lstStyle/>
+          <a:p>
+            <a:pPr>
+              <a:lnSpc>
+                <a:spcPts val="2200"/>
+              </a:lnSpc>
+              <a:spcAft>
+                <a:spcPts val="400"/>
+              </a:spcAft>
+            </a:pPr>
+            <a:r>
+              <a:rPr sz="2000" b="0">
+                <a:solidFill>
+                  <a:srgbClr val="333333"/>
+                </a:solidFill>
+                <a:latin typeface="Consolas"/>
+              </a:rPr>
+              <a:t>INPUT: positions, min_dist</a:t>
+            </a:r>
+          </a:p>
+          <a:p>
+            <a:pPr>
+              <a:lnSpc>
+                <a:spcPts val="2200"/>
+              </a:lnSpc>
+              <a:spcAft>
+                <a:spcPts val="400"/>
+              </a:spcAft>
+            </a:pPr>
+            <a:r>
+              <a:rPr sz="2000" b="0">
+                <a:solidFill>
+                  <a:srgbClr val="333333"/>
+                </a:solidFill>
+                <a:latin typeface="Consolas"/>
+              </a:rPr>
+              <a:t>OUTPUT: spread positions</a:t>
+            </a:r>
+          </a:p>
+          <a:p>
+            <a:pPr>
+              <a:lnSpc>
+                <a:spcPts val="2200"/>
+              </a:lnSpc>
+              <a:spcAft>
+                <a:spcPts val="400"/>
+              </a:spcAft>
+            </a:pPr>
+            <a:r>
+              <a:rPr sz="2000" b="0">
+                <a:solidFill>
+                  <a:srgbClr val="333333"/>
+                </a:solidFill>
+                <a:latin typeface="Consolas"/>
+              </a:rPr>
+              <a:t>while exists pair with dist &lt; min_dist:</a:t>
+            </a:r>
+          </a:p>
+          <a:p>
+            <a:pPr>
+              <a:lnSpc>
+                <a:spcPts val="2200"/>
+              </a:lnSpc>
+              <a:spcAft>
+                <a:spcPts val="400"/>
+              </a:spcAft>
+            </a:pPr>
+            <a:r>
+              <a:rPr sz="2000" b="0">
+                <a:solidFill>
+                  <a:srgbClr val="333333"/>
+                </a:solidFill>
+                <a:latin typeface="Consolas"/>
+              </a:rPr>
+              <a:t>  push the pair apart along their vector</a:t>
+            </a:r>
+          </a:p>
+          <a:p>
+            <a:pPr>
+              <a:lnSpc>
+                <a:spcPts val="2200"/>
+              </a:lnSpc>
+              <a:spcAft>
+                <a:spcPts val="400"/>
+              </a:spcAft>
+            </a:pPr>
+            <a:r>
+              <a:rPr sz="2000" b="0">
+                <a:solidFill>
+                  <a:srgbClr val="333333"/>
+                </a:solidFill>
+                <a:latin typeface="Consolas"/>
+              </a:rPr>
+              <a:t>stop when all pairs clear min_dist</a:t>
+            </a:r>
+          </a:p>
+          <a:p>
+            <a:pPr>
+              <a:lnSpc>
+                <a:spcPts val="2200"/>
+              </a:lnSpc>
+              <a:spcAft>
+                <a:spcPts val="400"/>
+              </a:spcAft>
+            </a:pPr>
+            <a:r>
+              <a:rPr sz="2000" b="0">
+                <a:solidFill>
+                  <a:srgbClr val="333333"/>
+                </a:solidFill>
+                <a:latin typeface="Consolas"/>
+              </a:rPr>
+              <a:t>NOTE: not row/site legalization</a:t>
+            </a:r>
+          </a:p>
+          <a:p>
+            <a:pPr>
+              <a:lnSpc>
+                <a:spcPts val="2200"/>
+              </a:lnSpc>
+              <a:spcAft>
+                <a:spcPts val="400"/>
+              </a:spcAft>
+            </a:pPr>
+            <a:r>
+              <a:rPr sz="2000" b="0">
+                <a:solidFill>
+                  <a:srgbClr val="333333"/>
+                </a:solidFill>
+                <a:latin typeface="Consolas"/>
+              </a:rPr>
+              <a:t>GOLDEN min_dist=0.5 on overlap seed</a:t>
+            </a:r>
+          </a:p>
+        </p:txBody>
+      </p:sp>
+      <p:sp>
+        <p:nvSpPr>
+          <p:cNvPr id="4" name="TextBox 3"/>
+          <p:cNvSpPr txBox="1"/>
+          <p:nvPr/>
+        </p:nvSpPr>
+        <p:spPr>
+          <a:xfrm>
+            <a:off x="548640" y="6355080"/>
+            <a:ext cx="11064240" cy="320040"/>
+          </a:xfrm>
+          <a:prstGeom prst="rect">
+            <a:avLst/>
+          </a:prstGeom>
+          <a:noFill/>
+        </p:spPr>
+        <p:txBody>
+          <a:bodyPr wrap="square">
+            <a:noAutofit/>
+          </a:bodyPr>
+          <a:lstStyle/>
+          <a:p>
+            <a:pPr algn="r">
+              <a:lnSpc>
+                <a:spcPts val="2200"/>
+              </a:lnSpc>
+              <a:defRPr sz="1000" b="0">
+                <a:solidFill>
+                  <a:srgbClr val="666666"/>
+                </a:solidFill>
+                <a:latin typeface="Calibri"/>
+              </a:defRPr>
+            </a:pPr>
+            <a:r>
+              <a:t>learn_placement — 03 spread legalize lite</a:t>
+            </a:r>
+          </a:p>
+        </p:txBody>
+      </p:sp>
+    </p:spTree>
+  </p:cSld>
+  <p:clrMapOvr>
+    <a:masterClrMapping/>
+  </p:clrMapOvr>
+</p:sld>
+</file>
+
+<file path=ppt/slides/slide6.xml><?xml version="1.0" encoding="utf-8"?>
 <p:sld xmlns:a="http://schemas.openxmlformats.org/drawingml/2006/main" xmlns:p="http://schemas.openxmlformats.org/presentationml/2006/main" xmlns:r="http://schemas.openxmlformats.org/officeDocument/2006/relationships">
   <p:cSld>
     <p:spTree>
@@ -5030,7 +6294,7 @@
 </p:sld>
 </file>
 
-<file path=ppt/slides/slide4.xml><?xml version="1.0" encoding="utf-8"?>
+<file path=ppt/slides/slide7.xml><?xml version="1.0" encoding="utf-8"?>
 <p:sld xmlns:a="http://schemas.openxmlformats.org/drawingml/2006/main" xmlns:p="http://schemas.openxmlformats.org/presentationml/2006/main" xmlns:r="http://schemas.openxmlformats.org/officeDocument/2006/relationships">
   <p:cSld>
     <p:spTree>
@@ -5189,7 +6453,7 @@
 </p:sld>
 </file>
 
-<file path=ppt/slides/slide5.xml><?xml version="1.0" encoding="utf-8"?>
+<file path=ppt/slides/slide8.xml><?xml version="1.0" encoding="utf-8"?>
 <p:sld xmlns:a="http://schemas.openxmlformats.org/drawingml/2006/main" xmlns:p="http://schemas.openxmlformats.org/presentationml/2006/main" xmlns:r="http://schemas.openxmlformats.org/officeDocument/2006/relationships">
   <p:cSld>
     <p:spTree>
@@ -5348,7 +6612,7 @@
 </p:sld>
 </file>
 
-<file path=ppt/slides/slide6.xml><?xml version="1.0" encoding="utf-8"?>
+<file path=ppt/slides/slide9.xml><?xml version="1.0" encoding="utf-8"?>
 <p:sld xmlns:a="http://schemas.openxmlformats.org/drawingml/2006/main" xmlns:p="http://schemas.openxmlformats.org/presentationml/2006/main" xmlns:r="http://schemas.openxmlformats.org/officeDocument/2006/relationships">
   <p:cSld>
     <p:spTree>
@@ -5463,553 +6727,6 @@
       <p:sp>
         <p:nvSpPr>
           <p:cNvPr id="5" name="TextBox 4"/>
-          <p:cNvSpPr txBox="1"/>
-          <p:nvPr/>
-        </p:nvSpPr>
-        <p:spPr>
-          <a:xfrm>
-            <a:off x="548640" y="6355080"/>
-            <a:ext cx="11064240" cy="320040"/>
-          </a:xfrm>
-          <a:prstGeom prst="rect">
-            <a:avLst/>
-          </a:prstGeom>
-          <a:noFill/>
-        </p:spPr>
-        <p:txBody>
-          <a:bodyPr wrap="square">
-            <a:noAutofit/>
-          </a:bodyPr>
-          <a:lstStyle/>
-          <a:p>
-            <a:pPr algn="r">
-              <a:lnSpc>
-                <a:spcPts val="2200"/>
-              </a:lnSpc>
-              <a:defRPr sz="1000" b="0">
-                <a:solidFill>
-                  <a:srgbClr val="666666"/>
-                </a:solidFill>
-                <a:latin typeface="Calibri"/>
-              </a:defRPr>
-            </a:pPr>
-            <a:r>
-              <a:t>learn_placement — 03 spread legalize lite</a:t>
-            </a:r>
-          </a:p>
-        </p:txBody>
-      </p:sp>
-    </p:spTree>
-  </p:cSld>
-  <p:clrMapOvr>
-    <a:masterClrMapping/>
-  </p:clrMapOvr>
-</p:sld>
-</file>
-
-<file path=ppt/slides/slide7.xml><?xml version="1.0" encoding="utf-8"?>
-<p:sld xmlns:a="http://schemas.openxmlformats.org/drawingml/2006/main" xmlns:p="http://schemas.openxmlformats.org/presentationml/2006/main" xmlns:r="http://schemas.openxmlformats.org/officeDocument/2006/relationships">
-  <p:cSld>
-    <p:spTree>
-      <p:nvGrpSpPr>
-        <p:cNvPr id="1" name=""/>
-        <p:cNvGrpSpPr/>
-        <p:nvPr/>
-      </p:nvGrpSpPr>
-      <p:grpSpPr/>
-      <p:sp>
-        <p:nvSpPr>
-          <p:cNvPr id="2" name="TextBox 1"/>
-          <p:cNvSpPr txBox="1"/>
-          <p:nvPr/>
-        </p:nvSpPr>
-        <p:spPr>
-          <a:xfrm>
-            <a:off x="548640" y="411480"/>
-            <a:ext cx="11064240" cy="777240"/>
-          </a:xfrm>
-          <a:prstGeom prst="rect">
-            <a:avLst/>
-          </a:prstGeom>
-          <a:noFill/>
-        </p:spPr>
-        <p:txBody>
-          <a:bodyPr wrap="square">
-            <a:noAutofit/>
-          </a:bodyPr>
-          <a:lstStyle/>
-          <a:p>
-            <a:pPr>
-              <a:lnSpc>
-                <a:spcPts val="2200"/>
-              </a:lnSpc>
-            </a:pPr>
-            <a:r>
-              <a:rPr sz="2800" b="1">
-                <a:solidFill>
-                  <a:srgbClr val="1A1A2E"/>
-                </a:solidFill>
-                <a:latin typeface="Calibri"/>
-              </a:rPr>
-              <a:t>Relieve overlap before celebrating WL</a:t>
-            </a:r>
-          </a:p>
-        </p:txBody>
-      </p:sp>
-      <p:pic>
-        <p:nvPicPr>
-          <p:cNvPr id="3" name="Picture 2" descr="05-takeaway.png"/>
-          <p:cNvPicPr>
-            <a:picLocks noChangeAspect="1"/>
-          </p:cNvPicPr>
-          <p:nvPr/>
-        </p:nvPicPr>
-        <p:blipFill>
-          <a:blip r:embed="rId2"/>
-          <a:stretch>
-            <a:fillRect/>
-          </a:stretch>
-        </p:blipFill>
-        <p:spPr>
-          <a:xfrm>
-            <a:off x="548640" y="1143000"/>
-            <a:ext cx="9404113" cy="4572000"/>
-          </a:xfrm>
-          <a:prstGeom prst="rect">
-            <a:avLst/>
-          </a:prstGeom>
-        </p:spPr>
-      </p:pic>
-      <p:sp>
-        <p:nvSpPr>
-          <p:cNvPr id="4" name="TextBox 3"/>
-          <p:cNvSpPr txBox="1"/>
-          <p:nvPr/>
-        </p:nvSpPr>
-        <p:spPr>
-          <a:xfrm>
-            <a:off x="548640" y="5897880"/>
-            <a:ext cx="11064240" cy="411480"/>
-          </a:xfrm>
-          <a:prstGeom prst="rect">
-            <a:avLst/>
-          </a:prstGeom>
-          <a:noFill/>
-        </p:spPr>
-        <p:txBody>
-          <a:bodyPr wrap="square">
-            <a:noAutofit/>
-          </a:bodyPr>
-          <a:lstStyle/>
-          <a:p>
-            <a:pPr>
-              <a:lnSpc>
-                <a:spcPts val="2200"/>
-              </a:lnSpc>
-            </a:pPr>
-            <a:r>
-              <a:rPr sz="1200" b="0">
-                <a:solidFill>
-                  <a:srgbClr val="333333"/>
-                </a:solidFill>
-                <a:latin typeface="Calibri"/>
-              </a:rPr>
-              <a:t>Relieve overlap before celebrating WL</a:t>
-            </a:r>
-          </a:p>
-        </p:txBody>
-      </p:sp>
-      <p:sp>
-        <p:nvSpPr>
-          <p:cNvPr id="5" name="TextBox 4"/>
-          <p:cNvSpPr txBox="1"/>
-          <p:nvPr/>
-        </p:nvSpPr>
-        <p:spPr>
-          <a:xfrm>
-            <a:off x="548640" y="6355080"/>
-            <a:ext cx="11064240" cy="320040"/>
-          </a:xfrm>
-          <a:prstGeom prst="rect">
-            <a:avLst/>
-          </a:prstGeom>
-          <a:noFill/>
-        </p:spPr>
-        <p:txBody>
-          <a:bodyPr wrap="square">
-            <a:noAutofit/>
-          </a:bodyPr>
-          <a:lstStyle/>
-          <a:p>
-            <a:pPr algn="r">
-              <a:lnSpc>
-                <a:spcPts val="2200"/>
-              </a:lnSpc>
-              <a:defRPr sz="1000" b="0">
-                <a:solidFill>
-                  <a:srgbClr val="666666"/>
-                </a:solidFill>
-                <a:latin typeface="Calibri"/>
-              </a:defRPr>
-            </a:pPr>
-            <a:r>
-              <a:t>learn_placement — 03 spread legalize lite</a:t>
-            </a:r>
-          </a:p>
-        </p:txBody>
-      </p:sp>
-    </p:spTree>
-  </p:cSld>
-  <p:clrMapOvr>
-    <a:masterClrMapping/>
-  </p:clrMapOvr>
-</p:sld>
-</file>
-
-<file path=ppt/slides/slide8.xml><?xml version="1.0" encoding="utf-8"?>
-<p:sld xmlns:a="http://schemas.openxmlformats.org/drawingml/2006/main" xmlns:p="http://schemas.openxmlformats.org/presentationml/2006/main" xmlns:r="http://schemas.openxmlformats.org/officeDocument/2006/relationships">
-  <p:cSld>
-    <p:spTree>
-      <p:nvGrpSpPr>
-        <p:cNvPr id="1" name=""/>
-        <p:cNvGrpSpPr/>
-        <p:nvPr/>
-      </p:nvGrpSpPr>
-      <p:grpSpPr/>
-      <p:sp>
-        <p:nvSpPr>
-          <p:cNvPr id="2" name="TextBox 1"/>
-          <p:cNvSpPr txBox="1"/>
-          <p:nvPr/>
-        </p:nvSpPr>
-        <p:spPr>
-          <a:xfrm>
-            <a:off x="548640" y="411480"/>
-            <a:ext cx="11064240" cy="777240"/>
-          </a:xfrm>
-          <a:prstGeom prst="rect">
-            <a:avLst/>
-          </a:prstGeom>
-          <a:noFill/>
-        </p:spPr>
-        <p:txBody>
-          <a:bodyPr wrap="square">
-            <a:noAutofit/>
-          </a:bodyPr>
-          <a:lstStyle/>
-          <a:p>
-            <a:pPr>
-              <a:lnSpc>
-                <a:spcPts val="2200"/>
-              </a:lnSpc>
-            </a:pPr>
-            <a:r>
-              <a:rPr sz="2800" b="1">
-                <a:solidFill>
-                  <a:srgbClr val="1A1A2E"/>
-                </a:solidFill>
-                <a:latin typeface="Calibri"/>
-              </a:rPr>
-              <a:t>Browser lab track</a:t>
-            </a:r>
-          </a:p>
-        </p:txBody>
-      </p:sp>
-      <p:sp>
-        <p:nvSpPr>
-          <p:cNvPr id="3" name="TextBox 2"/>
-          <p:cNvSpPr txBox="1"/>
-          <p:nvPr/>
-        </p:nvSpPr>
-        <p:spPr>
-          <a:xfrm>
-            <a:off x="548640" y="1234440"/>
-            <a:ext cx="11064240" cy="4937760"/>
-          </a:xfrm>
-          <a:prstGeom prst="rect">
-            <a:avLst/>
-          </a:prstGeom>
-          <a:noFill/>
-        </p:spPr>
-        <p:txBody>
-          <a:bodyPr wrap="square">
-            <a:noAutofit/>
-          </a:bodyPr>
-          <a:lstStyle/>
-          <a:p>
-            <a:pPr lvl="0" marL="457200" indent="-228600">
-              <a:buFont typeface="Calibri"/>
-              <a:spcAft>
-                <a:spcPts val="1000"/>
-              </a:spcAft>
-              <a:buSzPct val="100000"/>
-              <a:buChar char="•"/>
-              <a:lnSpc>
-                <a:spcPts val="2200"/>
-              </a:lnSpc>
-            </a:pPr>
-            <a:r>
-              <a:rPr sz="2000" b="0">
-                <a:solidFill>
-                  <a:srgbClr val="333333"/>
-                </a:solidFill>
-                <a:latin typeface="Calibri"/>
-              </a:rPr>
-              <a:t>In the browser lab track, open the </a:t>
-            </a:r>
-            <a:r>
-              <a:rPr sz="2000" b="1">
-                <a:solidFill>
-                  <a:srgbClr val="333333"/>
-                </a:solidFill>
-                <a:latin typeface="Calibri"/>
-              </a:rPr>
-              <a:t>spread-legalize-lite</a:t>
-            </a:r>
-            <a:r>
-              <a:rPr sz="2000" b="0">
-                <a:solidFill>
-                  <a:srgbClr val="333333"/>
-                </a:solidFill>
-                <a:latin typeface="Calibri"/>
-              </a:rPr>
-              <a:t> lab from the tools shelf</a:t>
-            </a:r>
-          </a:p>
-          <a:p>
-            <a:pPr lvl="0" marL="457200" indent="-228600">
-              <a:buFont typeface="Calibri"/>
-              <a:spcAft>
-                <a:spcPts val="1000"/>
-              </a:spcAft>
-              <a:buSzPct val="100000"/>
-              <a:buChar char="•"/>
-              <a:lnSpc>
-                <a:spcPts val="2200"/>
-              </a:lnSpc>
-            </a:pPr>
-            <a:r>
-              <a:rPr sz="2000" b="0">
-                <a:solidFill>
-                  <a:srgbClr val="333333"/>
-                </a:solidFill>
-                <a:latin typeface="Calibri"/>
-              </a:rPr>
-              <a:t>Load the starter placement, run the algorithm once</a:t>
-            </a:r>
-          </a:p>
-          <a:p>
-            <a:pPr lvl="0" marL="457200" indent="-228600">
-              <a:buFont typeface="Calibri"/>
-              <a:spcAft>
-                <a:spcPts val="1000"/>
-              </a:spcAft>
-              <a:buSzPct val="100000"/>
-              <a:buChar char="•"/>
-              <a:lnSpc>
-                <a:spcPts val="2200"/>
-              </a:lnSpc>
-            </a:pPr>
-            <a:r>
-              <a:rPr sz="2000" b="0">
-                <a:solidFill>
-                  <a:srgbClr val="333333"/>
-                </a:solidFill>
-                <a:latin typeface="Calibri"/>
-              </a:rPr>
-              <a:t>Work the challenges that lock the goldens</a:t>
-            </a:r>
-          </a:p>
-        </p:txBody>
-      </p:sp>
-      <p:sp>
-        <p:nvSpPr>
-          <p:cNvPr id="4" name="TextBox 3"/>
-          <p:cNvSpPr txBox="1"/>
-          <p:nvPr/>
-        </p:nvSpPr>
-        <p:spPr>
-          <a:xfrm>
-            <a:off x="548640" y="6355080"/>
-            <a:ext cx="11064240" cy="320040"/>
-          </a:xfrm>
-          <a:prstGeom prst="rect">
-            <a:avLst/>
-          </a:prstGeom>
-          <a:noFill/>
-        </p:spPr>
-        <p:txBody>
-          <a:bodyPr wrap="square">
-            <a:noAutofit/>
-          </a:bodyPr>
-          <a:lstStyle/>
-          <a:p>
-            <a:pPr algn="r">
-              <a:lnSpc>
-                <a:spcPts val="2200"/>
-              </a:lnSpc>
-              <a:defRPr sz="1000" b="0">
-                <a:solidFill>
-                  <a:srgbClr val="666666"/>
-                </a:solidFill>
-                <a:latin typeface="Calibri"/>
-              </a:defRPr>
-            </a:pPr>
-            <a:r>
-              <a:t>learn_placement — 03 spread legalize lite</a:t>
-            </a:r>
-          </a:p>
-        </p:txBody>
-      </p:sp>
-    </p:spTree>
-  </p:cSld>
-  <p:clrMapOvr>
-    <a:masterClrMapping/>
-  </p:clrMapOvr>
-</p:sld>
-</file>
-
-<file path=ppt/slides/slide9.xml><?xml version="1.0" encoding="utf-8"?>
-<p:sld xmlns:a="http://schemas.openxmlformats.org/drawingml/2006/main" xmlns:p="http://schemas.openxmlformats.org/presentationml/2006/main" xmlns:r="http://schemas.openxmlformats.org/officeDocument/2006/relationships">
-  <p:cSld>
-    <p:spTree>
-      <p:nvGrpSpPr>
-        <p:cNvPr id="1" name=""/>
-        <p:cNvGrpSpPr/>
-        <p:nvPr/>
-      </p:nvGrpSpPr>
-      <p:grpSpPr/>
-      <p:sp>
-        <p:nvSpPr>
-          <p:cNvPr id="2" name="TextBox 1"/>
-          <p:cNvSpPr txBox="1"/>
-          <p:nvPr/>
-        </p:nvSpPr>
-        <p:spPr>
-          <a:xfrm>
-            <a:off x="548640" y="411480"/>
-            <a:ext cx="11064240" cy="777240"/>
-          </a:xfrm>
-          <a:prstGeom prst="rect">
-            <a:avLst/>
-          </a:prstGeom>
-          <a:noFill/>
-        </p:spPr>
-        <p:txBody>
-          <a:bodyPr wrap="square">
-            <a:noAutofit/>
-          </a:bodyPr>
-          <a:lstStyle/>
-          <a:p>
-            <a:pPr>
-              <a:lnSpc>
-                <a:spcPts val="2200"/>
-              </a:lnSpc>
-            </a:pPr>
-            <a:r>
-              <a:rPr sz="2800" b="1">
-                <a:solidFill>
-                  <a:srgbClr val="1A1A2E"/>
-                </a:solidFill>
-                <a:latin typeface="Calibri"/>
-              </a:rPr>
-              <a:t>Implement track</a:t>
-            </a:r>
-          </a:p>
-        </p:txBody>
-      </p:sp>
-      <p:sp>
-        <p:nvSpPr>
-          <p:cNvPr id="3" name="TextBox 2"/>
-          <p:cNvSpPr txBox="1"/>
-          <p:nvPr/>
-        </p:nvSpPr>
-        <p:spPr>
-          <a:xfrm>
-            <a:off x="548640" y="1234440"/>
-            <a:ext cx="11064240" cy="4937760"/>
-          </a:xfrm>
-          <a:prstGeom prst="rect">
-            <a:avLst/>
-          </a:prstGeom>
-          <a:noFill/>
-        </p:spPr>
-        <p:txBody>
-          <a:bodyPr wrap="square">
-            <a:noAutofit/>
-          </a:bodyPr>
-          <a:lstStyle/>
-          <a:p>
-            <a:pPr lvl="0" marL="457200" indent="-228600">
-              <a:buFont typeface="Calibri"/>
-              <a:spcAft>
-                <a:spcPts val="1000"/>
-              </a:spcAft>
-              <a:buSzPct val="100000"/>
-              <a:buChar char="•"/>
-              <a:lnSpc>
-                <a:spcPts val="2200"/>
-              </a:lnSpc>
-            </a:pPr>
-            <a:r>
-              <a:rPr sz="2000" b="0">
-                <a:solidFill>
-                  <a:srgbClr val="333333"/>
-                </a:solidFill>
-                <a:latin typeface="Calibri"/>
-              </a:rPr>
-              <a:t>In the implement track, open this module’s examples and the course `common/` solvers</a:t>
-            </a:r>
-          </a:p>
-          <a:p>
-            <a:pPr lvl="0" marL="457200" indent="-228600">
-              <a:buFont typeface="Calibri"/>
-              <a:spcAft>
-                <a:spcPts val="1000"/>
-              </a:spcAft>
-              <a:buSzPct val="100000"/>
-              <a:buChar char="•"/>
-              <a:lnSpc>
-                <a:spcPts val="2200"/>
-              </a:lnSpc>
-            </a:pPr>
-            <a:r>
-              <a:rPr sz="2000" b="0">
-                <a:solidFill>
-                  <a:srgbClr val="333333"/>
-                </a:solidFill>
-                <a:latin typeface="Calibri"/>
-              </a:rPr>
-              <a:t>Parse `tiny_place.json`, run the algorithm with a deterministic seed</a:t>
-            </a:r>
-          </a:p>
-          <a:p>
-            <a:pPr lvl="0" marL="457200" indent="-228600">
-              <a:buFont typeface="Calibri"/>
-              <a:spcAft>
-                <a:spcPts val="1000"/>
-              </a:spcAft>
-              <a:buSzPct val="100000"/>
-              <a:buChar char="•"/>
-              <a:lnSpc>
-                <a:spcPts val="2200"/>
-              </a:lnSpc>
-            </a:pPr>
-            <a:r>
-              <a:rPr sz="2000" b="0">
-                <a:solidFill>
-                  <a:srgbClr val="333333"/>
-                </a:solidFill>
-                <a:latin typeface="Calibri"/>
-              </a:rPr>
-              <a:t>Match the browser goldens before you claim the checklist</a:t>
-            </a:r>
-          </a:p>
-        </p:txBody>
-      </p:sp>
-      <p:sp>
-        <p:nvSpPr>
-          <p:cNvPr id="4" name="TextBox 3"/>
           <p:cNvSpPr txBox="1"/>
           <p:nvPr/>
         </p:nvSpPr>
